--- a/events/sls-annual-assembly-2026/SLS_Annual_Assembly_2026_Event_Charter.pptx
+++ b/events/sls-annual-assembly-2026/SLS_Annual_Assembly_2026_Event_Charter.pptx
@@ -10154,7 +10154,7 @@
                           <a:latin typeface="Codec Pro"/>
                           <a:cs typeface="Arial" panose="020B0604020202020204" pitchFamily="34" charset="0"/>
                         </a:rPr>
-                        <a:t>Hena Experience Center (proposed)</a:t>
+                        <a:t>City Hub (proposed)</a:t>
                       </a:r>
                     </a:p>
                   </a:txBody>
@@ -10456,7 +10456,7 @@
                           <a:latin typeface="Codec Pro"/>
                           <a:cs typeface="Arial" panose="020B0604020202020204" pitchFamily="34" charset="0"/>
                         </a:rPr>
-                        <a:t>400 (estimated confirmed)</a:t>
+                        <a:t>300 (venue capacity)</a:t>
                       </a:r>
                       <a:endParaRPr dirty="0"/>
                     </a:p>
@@ -10786,7 +10786,7 @@
                           <a:latin typeface="Codec Pro"/>
                           <a:cs typeface="Arial" panose="020B0604020202020204" pitchFamily="34" charset="0"/>
                         </a:rPr>
-                        <a:t>400 SLS members</a:t>
+                        <a:t>300 SLS members</a:t>
                       </a:r>
                     </a:p>
                   </a:txBody>
@@ -11242,7 +11242,7 @@
                           <a:ea typeface="+mn-ea"/>
                           <a:cs typeface="Arial" panose="020B0604020202020204" pitchFamily="34" charset="0"/>
                         </a:rPr>
-                        <a:t>Members convene at the Hena Experience Center in Misk City for four hours: recognition of the partners, Council members, Chapter teams and contributors who carried the year, the impact their work produced, and the 2027 agenda. Around 400 of the membership are expected.</a:t>
+                        <a:t>Members convene at City Hub for four hours: the year's achievements shown and told by the members who delivered them, recognition of the partners, Council members, Chapter teams and contributors behind them, and the direction for 2027. Venue capacity is 300.</a:t>
                       </a:r>
                     </a:p>
                   </a:txBody>
@@ -13379,7 +13379,7 @@
                           <a:latin typeface="Codec Pro"/>
                           <a:cs typeface="Sakkal Majalla" panose="02000000000000000000" pitchFamily="2" charset="-78"/>
                         </a:rPr>
-                        <a:t>06/09/2026</a:t>
+                        <a:t>20/09/2026</a:t>
                       </a:r>
                       <a:endParaRPr lang="en-US" sz="900" b="0" i="0" u="none" strike="noStrike">
                         <a:solidFill>
@@ -13561,7 +13561,7 @@
                           <a:ea typeface="+mn-ea"/>
                           <a:cs typeface="Arial" panose="020B0604020202020204" pitchFamily="34" charset="0"/>
                         </a:rPr>
-                        <a:t>21/11/2026</a:t>
+                        <a:t>12/12/2026</a:t>
                       </a:r>
                       <a:endParaRPr lang="en-US" sz="900" b="0" i="0" u="none" strike="noStrike" kern="1200">
                         <a:solidFill>
@@ -13784,7 +13784,7 @@
                           <a:ea typeface="+mn-ea"/>
                           <a:cs typeface="Sakkal Majalla" panose="02000000000000000000" pitchFamily="2" charset="-78"/>
                         </a:rPr>
-                        <a:t>17/12/2026</a:t>
+                        <a:t>14/01/2027</a:t>
                       </a:r>
                       <a:endParaRPr lang="en-US" sz="900" b="0" i="0" u="none" strike="noStrike" kern="1200">
                         <a:solidFill>
@@ -13937,7 +13937,7 @@
                           <a:latin typeface="Codec Pro"/>
                           <a:cs typeface="Sakkal Majalla" panose="02000000000000000000" pitchFamily="2" charset="-78"/>
                         </a:rPr>
-                        <a:t>18/11/2026</a:t>
+                        <a:t>09/12/2026</a:t>
                       </a:r>
                       <a:endParaRPr lang="en-US" sz="900" b="0" i="0" u="none" strike="noStrike">
                         <a:solidFill>
@@ -14204,7 +14204,7 @@
                           <a:ea typeface="+mn-ea"/>
                           <a:cs typeface="Arial" panose="020B0604020202020204" pitchFamily="34" charset="0"/>
                         </a:rPr>
-                        <a:t>23/11/2026</a:t>
+                        <a:t>13/12/2026</a:t>
                       </a:r>
                       <a:endParaRPr lang="en-US" sz="900" b="0" i="0" u="none" strike="noStrike" kern="1200" dirty="0">
                         <a:solidFill>
@@ -14520,7 +14520,7 @@
                           <a:ea typeface="+mn-ea"/>
                           <a:cs typeface="Arial" panose="020B0604020202020204" pitchFamily="34" charset="0"/>
                         </a:rPr>
-                        <a:t>Close the SLS year by recognizing the people who carried it, in front of the full membership.</a:t>
+                        <a:t>Close the SLS year by showing what the society achieved and naming the people who achieved it.</a:t>
                       </a:r>
                     </a:p>
                     <a:p>
@@ -14551,7 +14551,7 @@
                           <a:ea typeface="+mn-ea"/>
                           <a:cs typeface="Arial" panose="020B0604020202020204" pitchFamily="34" charset="0"/>
                         </a:rPr>
-                        <a:t>Show what their work produced, open 2027 with members committed to it, and beat the 2024 benchmarks: satisfaction of 85% or better (2024: 77%), 85% of confirmed guests attending (2024: 320 of 468) and three or more introductions logged per member.</a:t>
+                        <a:t>Members should leave able to name three things SLS delivered in 2026, having seen their own contribution acknowledged, and knowing what 2027 asks of them. Benchmarks to beat: satisfaction of 85% or better (2024: 77%) and 85% of confirmed guests attending (2024: 320 of 468).</a:t>
                       </a:r>
                     </a:p>
                   </a:txBody>
@@ -14779,7 +14779,7 @@
                           <a:ea typeface="+mn-ea"/>
                           <a:cs typeface="Arial" panose="020B0604020202020204" pitchFamily="34" charset="0"/>
                         </a:rPr>
-                        <a:t>Venue: Hena Experience Center, Misk City - site survey before contract, access from 18/11</a:t>
+                        <a:t>Venue: City Hub - site survey and layout for 300 across stage, seating and networking areas</a:t>
                       </a:r>
                       <a:endParaRPr lang="en-US" sz="800" b="0" i="0" u="none" strike="noStrike" kern="1200" spc="0">
                         <a:solidFill>
@@ -14859,7 +14859,7 @@
                           <a:ea typeface="+mn-ea"/>
                           <a:cs typeface="Arial" panose="020B0604020202020204" pitchFamily="34" charset="0"/>
                         </a:rPr>
-                        <a:t>Stage and set: built stage, seating for 400, sightlines planned around the permanent exhibition</a:t>
+                        <a:t>Stage and set: stage and seating for 300, Year in Review gallery at the entrance</a:t>
                       </a:r>
                       <a:endParaRPr lang="en-US" sz="800" b="0" i="0" u="none" strike="noStrike" kern="1200" spc="0">
                         <a:solidFill>
@@ -14899,7 +14899,7 @@
                           <a:ea typeface="+mn-ea"/>
                           <a:cs typeface="Arial" panose="020B0604020202020204" pitchFamily="34" charset="0"/>
                         </a:rPr>
-                        <a:t>Production: LED, sound, lighting, screen content, show-calling, standby generator and UPS</a:t>
+                        <a:t>Production: LED, sound, lighting, screen content, show-calling, standby power</a:t>
                       </a:r>
                       <a:endParaRPr lang="en-US" sz="800" b="0" i="0" u="none" strike="noStrike" kern="1200" spc="0">
                         <a:solidFill>
@@ -14939,7 +14939,7 @@
                           <a:ea typeface="+mn-ea"/>
                           <a:cs typeface="Arial" panose="020B0604020202020204" pitchFamily="34" charset="0"/>
                         </a:rPr>
-                        <a:t>Digital: network graph wall, member app, badge scan, live voting, bonded internet with failover</a:t>
+                        <a:t>Content: three member stories, key messages, scripts, speaker and moderator briefing</a:t>
                       </a:r>
                       <a:endParaRPr lang="en-US" sz="800" b="0" i="0" u="none" strike="noStrike" kern="1200" spc="0">
                         <a:solidFill>
@@ -14979,7 +14979,7 @@
                           <a:ea typeface="+mn-ea"/>
                           <a:cs typeface="Arial" panose="020B0604020202020204" pitchFamily="34" charset="0"/>
                         </a:rPr>
-                        <a:t>Program: run of show, speaker briefing, Isha prayer inside the arrival window</a:t>
+                        <a:t>Recognition: Wall of the Year, nominations with the RSVP, citations, letters to employers</a:t>
                       </a:r>
                       <a:endParaRPr lang="en-US" sz="800" b="0" i="0" u="none" strike="noStrike" kern="1200" spc="0">
                         <a:solidFill>
@@ -15019,7 +15019,7 @@
                           <a:ea typeface="+mn-ea"/>
                           <a:cs typeface="Arial" panose="020B0604020202020204" pitchFamily="34" charset="0"/>
                         </a:rPr>
-                        <a:t>Registration: online sign-up, digital badge, profile and consent capture, 48-hour reconfirmation</a:t>
+                        <a:t>Program: run of show, Isha inside the arrival window, one floor break mid-evening</a:t>
                       </a:r>
                       <a:endParaRPr lang="en-US" sz="800" b="0" i="0" u="none" strike="noStrike" kern="1200" spc="0">
                         <a:solidFill>
@@ -15059,7 +15059,7 @@
                           <a:ea typeface="+mn-ea"/>
                           <a:cs typeface="Arial" panose="020B0604020202020204" pitchFamily="34" charset="0"/>
                         </a:rPr>
-                        <a:t>Recognition: Wall of the Year, peer nomination flow, honoree evidence, photo drop, letters</a:t>
+                        <a:t>Registration: online sign-up, digital badge, RSVP cap and waitlist, 48-hour reconfirmation</a:t>
                       </a:r>
                       <a:endParaRPr lang="en-US" sz="800" b="0" i="0" u="none" strike="noStrike" kern="1200" spc="0">
                         <a:solidFill>
@@ -15139,7 +15139,7 @@
                           <a:ea typeface="+mn-ea"/>
                           <a:cs typeface="Arial" panose="020B0604020202020204" pitchFamily="34" charset="0"/>
                         </a:rPr>
-                        <a:t>F&amp;B: dinner scaled to reconfirmed numbers, staged release, live cooking and pass-around</a:t>
+                        <a:t>F&amp;B: dinner scaled to reconfirmed numbers, staged release</a:t>
                       </a:r>
                       <a:endParaRPr lang="en-US" sz="800" b="0" i="0" u="none" strike="noStrike" kern="1200" spc="0">
                         <a:solidFill>
@@ -15219,7 +15219,7 @@
                           <a:ea typeface="+mn-ea"/>
                           <a:cs typeface="Arial" panose="020B0604020202020204" pitchFamily="34" charset="0"/>
                         </a:rPr>
-                        <a:t>Post-event: personal network cards, attendee survey and post-event report</a:t>
+                        <a:t>Post-event: attendee survey and post-event report</a:t>
                       </a:r>
                       <a:endParaRPr lang="en-US" sz="800" b="0" i="0" u="none" strike="noStrike" kern="1200" spc="0">
                         <a:solidFill>
@@ -17452,7 +17452,7 @@
                           <a:ea typeface="+mn-ea"/>
                           <a:cs typeface="Arial" panose="020B0604020202020204" pitchFamily="34" charset="0"/>
                         </a:rPr>
-                        <a:t>Hena Experience Center</a:t>
+                        <a:t>City Hub</a:t>
                       </a:r>
                     </a:p>
                     <a:p>
@@ -18703,7 +18703,7 @@
                           <a:ea typeface="+mn-ea"/>
                           <a:cs typeface="+mn-cs"/>
                         </a:rPr>
-                        <a:t>06/09/2026</a:t>
+                        <a:t>20/09/2026</a:t>
                       </a:r>
                       <a:endParaRPr kumimoji="0" lang="en-US" sz="900" b="0" i="0" u="none" strike="noStrike" kern="1200" cap="none" spc="0" normalizeH="0" baseline="0">
                         <a:ln>
@@ -18808,7 +18808,7 @@
                           <a:ea typeface="+mn-ea"/>
                           <a:cs typeface="+mn-cs"/>
                         </a:rPr>
-                        <a:t>01/10/2026</a:t>
+                        <a:t>15/10/2026</a:t>
                       </a:r>
                       <a:endParaRPr kumimoji="0" lang="en-US" sz="900" b="0" i="0" u="none" strike="noStrike" kern="1200" cap="none" spc="0" normalizeH="0" baseline="0" dirty="0">
                         <a:ln>
@@ -19110,7 +19110,7 @@
                           <a:ea typeface="+mn-ea"/>
                           <a:cs typeface="+mn-cs"/>
                         </a:rPr>
-                        <a:t>Venue contract, agency award, run of show, graph and recognition data</a:t>
+                        <a:t>Venue contract, agency award, run of show, achievements and citations</a:t>
                       </a:r>
                     </a:p>
                   </a:txBody>
@@ -19201,7 +19201,7 @@
                           <a:ea typeface="+mn-ea"/>
                           <a:cs typeface="+mn-cs"/>
                         </a:rPr>
-                        <a:t>04/10/2026</a:t>
+                        <a:t>18/10/2026</a:t>
                       </a:r>
                       <a:endParaRPr kumimoji="0" lang="en-US" sz="900" b="0" i="0" u="none" strike="noStrike" kern="1200" cap="none" spc="0" normalizeH="0" baseline="0">
                         <a:ln>
@@ -19306,7 +19306,7 @@
                           <a:ea typeface="+mn-ea"/>
                           <a:cs typeface="+mn-cs"/>
                         </a:rPr>
-                        <a:t>05/11/2026</a:t>
+                        <a:t>19/11/2026</a:t>
                       </a:r>
                       <a:endParaRPr kumimoji="0" lang="en-US" sz="900" b="0" i="0" u="none" strike="noStrike" kern="1200" cap="none" spc="0" normalizeH="0" baseline="0">
                         <a:ln>
@@ -19608,7 +19608,7 @@
                           <a:ea typeface="+mn-ea"/>
                           <a:cs typeface="+mn-cs"/>
                         </a:rPr>
-                        <a:t>Registration, member profiles and digital badges</a:t>
+                        <a:t>Invitations, registration and digital badges</a:t>
                       </a:r>
                     </a:p>
                     <a:p>
@@ -19644,7 +19644,7 @@
                           <a:ea typeface="+mn-ea"/>
                           <a:cs typeface="+mn-cs"/>
                         </a:rPr>
-                        <a:t>Build, stage, graph integration and rehearsal</a:t>
+                        <a:t>Build, stage, gallery and rehearsal</a:t>
                       </a:r>
                     </a:p>
                     <a:p>
@@ -19771,7 +19771,7 @@
                           <a:ea typeface="+mn-ea"/>
                           <a:cs typeface="+mn-cs"/>
                         </a:rPr>
-                        <a:t>08/11/2026</a:t>
+                        <a:t>22/11/2026</a:t>
                       </a:r>
                       <a:endParaRPr kumimoji="0" lang="en-US" sz="900" b="0" i="0" u="none" strike="noStrike" kern="1200" cap="none" spc="0" normalizeH="0" baseline="0">
                         <a:ln>
@@ -19821,7 +19821,7 @@
                           <a:ea typeface="+mn-ea"/>
                           <a:cs typeface="+mn-cs"/>
                         </a:rPr>
-                        <a:t>18/11/2026</a:t>
+                        <a:t>09/12/2026</a:t>
                       </a:r>
                       <a:endParaRPr kumimoji="0" lang="en-US" sz="900" b="0" i="0" u="none" strike="noStrike" kern="1200" cap="none" spc="0" normalizeH="0" baseline="0">
                         <a:ln>
@@ -19871,7 +19871,7 @@
                           <a:ea typeface="+mn-ea"/>
                           <a:cs typeface="+mn-cs"/>
                         </a:rPr>
-                        <a:t>21/11/2026</a:t>
+                        <a:t>12/12/2026</a:t>
                       </a:r>
                       <a:endParaRPr kumimoji="0" lang="en-US" sz="900" b="0" i="0" u="none" strike="noStrike" kern="1200" cap="none" spc="0" normalizeH="0" baseline="0">
                         <a:ln>
@@ -19976,7 +19976,7 @@
                           <a:ea typeface="+mn-ea"/>
                           <a:cs typeface="+mn-cs"/>
                         </a:rPr>
-                        <a:t>19/11/2026</a:t>
+                        <a:t>10/12/2026</a:t>
                       </a:r>
                       <a:endParaRPr kumimoji="0" lang="en-US" sz="900" b="0" i="0" u="none" strike="noStrike" kern="1200" cap="none" spc="0" normalizeH="0" baseline="0">
                         <a:ln>
@@ -20026,7 +20026,7 @@
                           <a:ea typeface="+mn-ea"/>
                           <a:cs typeface="+mn-cs"/>
                         </a:rPr>
-                        <a:t>20/11/2026</a:t>
+                        <a:t>11/12/2026</a:t>
                       </a:r>
                       <a:endParaRPr kumimoji="0" lang="en-US" sz="900" b="0" i="0" u="none" strike="noStrike" kern="1200" cap="none" spc="0" normalizeH="0" baseline="0">
                         <a:ln>
@@ -20076,7 +20076,7 @@
                           <a:ea typeface="+mn-ea"/>
                           <a:cs typeface="+mn-cs"/>
                         </a:rPr>
-                        <a:t>23/11/2026</a:t>
+                        <a:t>13/12/2026</a:t>
                       </a:r>
                       <a:endParaRPr kumimoji="0" lang="en-US" sz="900" b="0" i="0" u="none" strike="noStrike" kern="1200" cap="none" spc="0" normalizeH="0" baseline="0">
                         <a:ln>
@@ -20378,7 +20378,7 @@
                           <a:ea typeface="+mn-ea"/>
                           <a:cs typeface="+mn-cs"/>
                         </a:rPr>
-                        <a:t>Post-event report, network metrics and vendor closeout</a:t>
+                        <a:t>Post-event report, survey results and vendor closeout</a:t>
                       </a:r>
                     </a:p>
                   </a:txBody>
@@ -20469,7 +20469,7 @@
                           <a:ea typeface="+mn-ea"/>
                           <a:cs typeface="+mn-cs"/>
                         </a:rPr>
-                        <a:t>24/11/2026</a:t>
+                        <a:t>14/12/2026</a:t>
                       </a:r>
                       <a:endParaRPr kumimoji="0" lang="en-US" sz="900" b="0" i="0" u="none" strike="noStrike" kern="1200" cap="none" spc="0" normalizeH="0" baseline="0">
                         <a:ln>
@@ -20574,7 +20574,7 @@
                           <a:ea typeface="+mn-ea"/>
                           <a:cs typeface="+mn-cs"/>
                         </a:rPr>
-                        <a:t>17/12/2026</a:t>
+                        <a:t>14/01/2027</a:t>
                       </a:r>
                       <a:endParaRPr kumimoji="0" lang="en-US" sz="900" b="0" i="0" u="none" strike="noStrike" kern="1200" cap="none" spc="0" normalizeH="0" baseline="0" dirty="0">
                         <a:ln>
@@ -21491,7 +21491,7 @@
                           <a:ea typeface="+mn-ea"/>
                           <a:cs typeface="Arial" panose="020B0604020202020204" pitchFamily="34" charset="0"/>
                         </a:rPr>
-                        <a:t>Attendance gap: 320 of 468 attended in 2024.</a:t>
+                        <a:t>300 seats against a full-membership invitation.</a:t>
                       </a:r>
                       <a:endParaRPr lang="en-US" sz="900" b="0" kern="0">
                         <a:solidFill>
@@ -21690,7 +21690,7 @@
                           <a:ea typeface="+mn-ea"/>
                           <a:cs typeface="Arial" panose="020B0604020202020204" pitchFamily="34" charset="0"/>
                         </a:rPr>
-                        <a:t>Catering and seating built to a 48-hour reconfirmed headcount.</a:t>
+                        <a:t>Phased RSVP with a waitlist; seating and dinner to a 48-hour reconfirmed count.</a:t>
                       </a:r>
                       <a:endParaRPr lang="en-US" sz="900" b="0" kern="0" dirty="0">
                         <a:solidFill>
@@ -21961,7 +21961,7 @@
                           <a:ea typeface="+mn-ea"/>
                           <a:cs typeface="Arial" panose="020B0604020202020204" pitchFamily="34" charset="0"/>
                         </a:rPr>
-                        <a:t>Building a stage for 400 inside a live exhibition space.</a:t>
+                        <a:t>Achievements and citations not collected in time to build content.</a:t>
                       </a:r>
                       <a:endParaRPr lang="en-US" sz="900" b="0" kern="0">
                         <a:solidFill>
@@ -22160,7 +22160,7 @@
                           <a:ea typeface="+mn-ea"/>
                           <a:cs typeface="Arial" panose="020B0604020202020204" pitchFamily="34" charset="0"/>
                         </a:rPr>
-                        <a:t>Site survey before signature; exclusive build access; standby power and network.</a:t>
+                        <a:t>One collection request to Chapter leads and the Council, due 19/11 with planning.</a:t>
                       </a:r>
                       <a:endParaRPr lang="en-US" sz="900" b="0" kern="0">
                         <a:solidFill>
@@ -22261,7 +22261,7 @@
                           <a:ea typeface="+mn-ea"/>
                           <a:cs typeface="Arial" panose="020B0604020202020204" pitchFamily="34" charset="0"/>
                         </a:rPr>
-                        <a:t>EMU / Production</a:t>
+                        <a:t>Leadership Track</a:t>
                       </a:r>
                       <a:endParaRPr lang="en-US" sz="900" b="0" kern="0" dirty="0">
                         <a:solidFill>

--- a/events/sls-annual-assembly-2026/SLS_Annual_Assembly_2026_Event_Charter.pptx
+++ b/events/sls-annual-assembly-2026/SLS_Annual_Assembly_2026_Event_Charter.pptx
@@ -14939,7 +14939,7 @@
                           <a:ea typeface="+mn-ea"/>
                           <a:cs typeface="Arial" panose="020B0604020202020204" pitchFamily="34" charset="0"/>
                         </a:rPr>
-                        <a:t>Content: three member stories, key messages, scripts, speaker and moderator briefing</a:t>
+                        <a:t>Content: the 2026 year compiled by the SLS team, three member stories, scripts, briefings</a:t>
                       </a:r>
                       <a:endParaRPr lang="en-US" sz="800" b="0" i="0" u="none" strike="noStrike" kern="1200" spc="0">
                         <a:solidFill>
@@ -14979,7 +14979,7 @@
                           <a:ea typeface="+mn-ea"/>
                           <a:cs typeface="Arial" panose="020B0604020202020204" pitchFamily="34" charset="0"/>
                         </a:rPr>
-                        <a:t>Recognition: Wall of the Year, nominations with the RSVP, citations, letters to employers</a:t>
+                        <a:t>Recognition: Wall of the Year, shortlist and citations prepared by the SLS team, letters</a:t>
                       </a:r>
                       <a:endParaRPr lang="en-US" sz="800" b="0" i="0" u="none" strike="noStrike" kern="1200" spc="0">
                         <a:solidFill>
@@ -15059,7 +15059,7 @@
                           <a:ea typeface="+mn-ea"/>
                           <a:cs typeface="Arial" panose="020B0604020202020204" pitchFamily="34" charset="0"/>
                         </a:rPr>
-                        <a:t>Registration: online sign-up, digital badge, RSVP cap and waitlist, 48-hour reconfirmation</a:t>
+                        <a:t>Registration: managed invitations, digital badge, RSVP cap and waitlist, team-confirmed count</a:t>
                       </a:r>
                       <a:endParaRPr lang="en-US" sz="800" b="0" i="0" u="none" strike="noStrike" kern="1200" spc="0">
                         <a:solidFill>
@@ -15099,7 +15099,7 @@
                           <a:ea typeface="+mn-ea"/>
                           <a:cs typeface="Arial" panose="020B0604020202020204" pitchFamily="34" charset="0"/>
                         </a:rPr>
-                        <a:t>Guest experience: protocol, seating, signage and wayfinding, valet, parking, accessibility</a:t>
+                        <a:t>Guest experience: VIP protocol, meet and greet, seating, wayfinding, valet, parking, access</a:t>
                       </a:r>
                       <a:endParaRPr lang="en-US" sz="800" b="0" i="0" u="none" strike="noStrike" kern="1200" spc="0">
                         <a:solidFill>
@@ -19110,7 +19110,7 @@
                           <a:ea typeface="+mn-ea"/>
                           <a:cs typeface="+mn-cs"/>
                         </a:rPr>
-                        <a:t>Venue contract, agency award, run of show, achievements and citations</a:t>
+                        <a:t>Venue contract, agency award, run of show, 2026 year compiled, citations</a:t>
                       </a:r>
                     </a:p>
                   </a:txBody>
@@ -21690,7 +21690,7 @@
                           <a:ea typeface="+mn-ea"/>
                           <a:cs typeface="Arial" panose="020B0604020202020204" pitchFamily="34" charset="0"/>
                         </a:rPr>
-                        <a:t>Phased RSVP with a waitlist; seating and dinner to a 48-hour reconfirmed count.</a:t>
+                        <a:t>Phased invitations with a waitlist; seating and dinner to a team-confirmed count.</a:t>
                       </a:r>
                       <a:endParaRPr lang="en-US" sz="900" b="0" kern="0" dirty="0">
                         <a:solidFill>
@@ -21961,7 +21961,7 @@
                           <a:ea typeface="+mn-ea"/>
                           <a:cs typeface="Arial" panose="020B0604020202020204" pitchFamily="34" charset="0"/>
                         </a:rPr>
-                        <a:t>Achievements and citations not collected in time to build content.</a:t>
+                        <a:t>The 2026 year is not compiled in time to build the content.</a:t>
                       </a:r>
                       <a:endParaRPr lang="en-US" sz="900" b="0" kern="0">
                         <a:solidFill>
@@ -22160,7 +22160,7 @@
                           <a:ea typeface="+mn-ea"/>
                           <a:cs typeface="Arial" panose="020B0604020202020204" pitchFamily="34" charset="0"/>
                         </a:rPr>
-                        <a:t>One collection request to Chapter leads and the Council, due 19/11 with planning.</a:t>
+                        <a:t>SLS team compiles from its own records by 19/11; Chapters asked only for gaps.</a:t>
                       </a:r>
                       <a:endParaRPr lang="en-US" sz="900" b="0" kern="0">
                         <a:solidFill>
@@ -24611,6 +24611,42 @@
           </a:graphicData>
         </a:graphic>
       </p:graphicFrame>
+      <p:pic>
+        <p:nvPicPr>
+          <p:cNvPr id="30" name="Picture 29" descr="A black background with a black square&#10;&#10;Description automatically generated with medium confidence">
+            <a:extLst>
+              <a:ext uri="{FF2B5EF4-FFF2-40B4-BE49-F238E27FC236}">
+                <a16:creationId xmlns:a16="http://schemas.microsoft.com/office/drawing/2014/main" id="{C9D4C1E8-3BA8-8C55-4A33-903C27D61415}"/>
+              </a:ext>
+            </a:extLst>
+          </p:cNvPr>
+          <p:cNvPicPr>
+            <a:picLocks noChangeAspect="1"/>
+          </p:cNvPicPr>
+          <p:nvPr/>
+        </p:nvPicPr>
+        <p:blipFill>
+          <a:blip r:embed="rId4">
+            <a:extLst>
+              <a:ext uri="{28A0092B-C50C-407E-A947-70E740481C1C}">
+                <a14:useLocalDpi xmlns:a14="http://schemas.microsoft.com/office/drawing/2010/main" val="0"/>
+              </a:ext>
+            </a:extLst>
+          </a:blip>
+          <a:stretch>
+            <a:fillRect/>
+          </a:stretch>
+        </p:blipFill>
+        <p:spPr>
+          <a:xfrm>
+            <a:off x="6616122" y="4196048"/>
+            <a:ext cx="274320" cy="274320"/>
+          </a:xfrm>
+          <a:prstGeom prst="rect">
+            <a:avLst/>
+          </a:prstGeom>
+        </p:spPr>
+      </p:pic>
       <p:pic>
         <p:nvPicPr>
           <p:cNvPr id="31" name="Picture 30" descr="A black background with a black square&#10;&#10;Description automatically generated with medium confidence">
